--- a/Python/Pre Class Exercises/Lesson 4 Pre-Class Problems.pptx
+++ b/Python/Pre Class Exercises/Lesson 4 Pre-Class Problems.pptx
@@ -2,15 +2,17 @@
 <file path=ppt/presentation.xml><?xml version="1.0" encoding="utf-8"?>
 <p:presentation xmlns:a="http://schemas.openxmlformats.org/drawingml/2006/main" xmlns:r="http://schemas.openxmlformats.org/officeDocument/2006/relationships" xmlns:mc="http://schemas.openxmlformats.org/markup-compatibility/2006" xmlns:mv="urn:schemas-microsoft-com:mac:vml" xmlns:p="http://schemas.openxmlformats.org/presentationml/2006/main" xmlns:c="http://schemas.openxmlformats.org/drawingml/2006/chart" xmlns:dgm="http://schemas.openxmlformats.org/drawingml/2006/diagram" xmlns:o="urn:schemas-microsoft-com:office:office" xmlns:v="urn:schemas-microsoft-com:vml" xmlns:pvml="urn:schemas-microsoft-com:office:powerpoint" xmlns:com="http://schemas.openxmlformats.org/drawingml/2006/compatibility" xmlns:p14="http://schemas.microsoft.com/office/powerpoint/2010/main" xmlns:p15="http://schemas.microsoft.com/office/powerpoint/2012/main" xmlns:ahyp="http://schemas.microsoft.com/office/drawing/2018/hyperlinkcolor" autoCompressPictures="0" strictFirstAndLastChars="0" saveSubsetFonts="1">
   <p:sldMasterIdLst>
-    <p:sldMasterId id="2147483659" r:id="rId4"/>
+    <p:sldMasterId id="2147483659" r:id="rId5"/>
   </p:sldMasterIdLst>
   <p:notesMasterIdLst>
-    <p:notesMasterId r:id="rId5"/>
+    <p:notesMasterId r:id="rId6"/>
   </p:notesMasterIdLst>
   <p:sldIdLst>
-    <p:sldId id="256" r:id="rId6"/>
-    <p:sldId id="257" r:id="rId7"/>
-    <p:sldId id="258" r:id="rId8"/>
+    <p:sldId id="256" r:id="rId7"/>
+    <p:sldId id="257" r:id="rId8"/>
+    <p:sldId id="258" r:id="rId9"/>
+    <p:sldId id="259" r:id="rId10"/>
+    <p:sldId id="260" r:id="rId11"/>
   </p:sldIdLst>
   <p:sldSz cy="5143500" cx="9144000"/>
   <p:notesSz cx="6858000" cy="9144000"/>
@@ -792,7 +794,7 @@
   <p:cSld>
     <p:spTree>
       <p:nvGrpSpPr>
-        <p:cNvPr id="56" name="Shape 56"/>
+        <p:cNvPr id="55" name="Shape 55"/>
         <p:cNvGrpSpPr/>
         <p:nvPr/>
       </p:nvGrpSpPr>
@@ -806,7 +808,7 @@
       </p:grpSpPr>
       <p:sp>
         <p:nvSpPr>
-          <p:cNvPr id="57" name="Google Shape;57;g37105969b97_0_0:notes"/>
+          <p:cNvPr id="56" name="Google Shape;56;g37105969b97_0_0:notes"/>
           <p:cNvSpPr/>
           <p:nvPr>
             <p:ph idx="2" type="sldImg"/>
@@ -841,7 +843,7 @@
       </p:sp>
       <p:sp>
         <p:nvSpPr>
-          <p:cNvPr id="58" name="Google Shape;58;g37105969b97_0_0:notes"/>
+          <p:cNvPr id="57" name="Google Shape;57;g37105969b97_0_0:notes"/>
           <p:cNvSpPr txBox="1"/>
           <p:nvPr>
             <p:ph idx="1" type="body"/>
@@ -891,7 +893,7 @@
   <p:cSld>
     <p:spTree>
       <p:nvGrpSpPr>
-        <p:cNvPr id="61" name="Shape 61"/>
+        <p:cNvPr id="60" name="Shape 60"/>
         <p:cNvGrpSpPr/>
         <p:nvPr/>
       </p:nvGrpSpPr>
@@ -905,7 +907,7 @@
       </p:grpSpPr>
       <p:sp>
         <p:nvSpPr>
-          <p:cNvPr id="62" name="Google Shape;62;g37105969b97_1_0:notes"/>
+          <p:cNvPr id="61" name="Google Shape;61;g3715ed335dd_0_0:notes"/>
           <p:cNvSpPr/>
           <p:nvPr>
             <p:ph idx="2" type="sldImg"/>
@@ -940,7 +942,205 @@
       </p:sp>
       <p:sp>
         <p:nvSpPr>
-          <p:cNvPr id="63" name="Google Shape;63;g37105969b97_1_0:notes"/>
+          <p:cNvPr id="62" name="Google Shape;62;g3715ed335dd_0_0:notes"/>
+          <p:cNvSpPr txBox="1"/>
+          <p:nvPr>
+            <p:ph idx="1" type="body"/>
+          </p:nvPr>
+        </p:nvSpPr>
+        <p:spPr>
+          <a:xfrm>
+            <a:off x="685800" y="4343400"/>
+            <a:ext cx="5486400" cy="4114800"/>
+          </a:xfrm>
+          <a:prstGeom prst="rect">
+            <a:avLst/>
+          </a:prstGeom>
+        </p:spPr>
+        <p:txBody>
+          <a:bodyPr anchorCtr="0" anchor="t" bIns="91425" lIns="91425" spcFirstLastPara="1" rIns="91425" wrap="square" tIns="91425">
+            <a:noAutofit/>
+          </a:bodyPr>
+          <a:lstStyle/>
+          <a:p>
+            <a:pPr indent="0" lvl="0" marL="0" rtl="0" algn="l">
+              <a:spcBef>
+                <a:spcPts val="0"/>
+              </a:spcBef>
+              <a:spcAft>
+                <a:spcPts val="0"/>
+              </a:spcAft>
+              <a:buNone/>
+            </a:pPr>
+            <a:r>
+              <a:t/>
+            </a:r>
+            <a:endParaRPr/>
+          </a:p>
+        </p:txBody>
+      </p:sp>
+    </p:spTree>
+  </p:cSld>
+  <p:clrMapOvr>
+    <a:masterClrMapping/>
+  </p:clrMapOvr>
+</p:notes>
+</file>
+
+<file path=ppt/notesSlides/notesSlide4.xml><?xml version="1.0" encoding="utf-8"?>
+<p:notes xmlns:a="http://schemas.openxmlformats.org/drawingml/2006/main" xmlns:r="http://schemas.openxmlformats.org/officeDocument/2006/relationships" xmlns:mc="http://schemas.openxmlformats.org/markup-compatibility/2006" xmlns:mv="urn:schemas-microsoft-com:mac:vml" xmlns:p="http://schemas.openxmlformats.org/presentationml/2006/main" xmlns:c="http://schemas.openxmlformats.org/drawingml/2006/chart" xmlns:dgm="http://schemas.openxmlformats.org/drawingml/2006/diagram" xmlns:o="urn:schemas-microsoft-com:office:office" xmlns:v="urn:schemas-microsoft-com:vml" xmlns:pvml="urn:schemas-microsoft-com:office:powerpoint" xmlns:com="http://schemas.openxmlformats.org/drawingml/2006/compatibility" xmlns:p14="http://schemas.microsoft.com/office/powerpoint/2010/main" xmlns:p15="http://schemas.microsoft.com/office/powerpoint/2012/main" xmlns:ahyp="http://schemas.microsoft.com/office/drawing/2018/hyperlinkcolor" showMasterPhAnim="0" showMasterSp="0">
+  <p:cSld>
+    <p:spTree>
+      <p:nvGrpSpPr>
+        <p:cNvPr id="66" name="Shape 66"/>
+        <p:cNvGrpSpPr/>
+        <p:nvPr/>
+      </p:nvGrpSpPr>
+      <p:grpSpPr>
+        <a:xfrm>
+          <a:off x="0" y="0"/>
+          <a:ext cx="0" cy="0"/>
+          <a:chOff x="0" y="0"/>
+          <a:chExt cx="0" cy="0"/>
+        </a:xfrm>
+      </p:grpSpPr>
+      <p:sp>
+        <p:nvSpPr>
+          <p:cNvPr id="67" name="Google Shape;67;g37105969b97_1_0:notes"/>
+          <p:cNvSpPr/>
+          <p:nvPr>
+            <p:ph idx="2" type="sldImg"/>
+          </p:nvPr>
+        </p:nvSpPr>
+        <p:spPr>
+          <a:xfrm>
+            <a:off x="381300" y="685800"/>
+            <a:ext cx="6096000" cy="3429000"/>
+          </a:xfrm>
+          <a:custGeom>
+            <a:rect b="b" l="l" r="r" t="t"/>
+            <a:pathLst>
+              <a:path extrusionOk="0" h="120000" w="120000">
+                <a:moveTo>
+                  <a:pt x="0" y="0"/>
+                </a:moveTo>
+                <a:lnTo>
+                  <a:pt x="120000" y="0"/>
+                </a:lnTo>
+                <a:lnTo>
+                  <a:pt x="120000" y="120000"/>
+                </a:lnTo>
+                <a:lnTo>
+                  <a:pt x="0" y="120000"/>
+                </a:lnTo>
+                <a:close/>
+              </a:path>
+            </a:pathLst>
+          </a:custGeom>
+        </p:spPr>
+      </p:sp>
+      <p:sp>
+        <p:nvSpPr>
+          <p:cNvPr id="68" name="Google Shape;68;g37105969b97_1_0:notes"/>
+          <p:cNvSpPr txBox="1"/>
+          <p:nvPr>
+            <p:ph idx="1" type="body"/>
+          </p:nvPr>
+        </p:nvSpPr>
+        <p:spPr>
+          <a:xfrm>
+            <a:off x="685800" y="4343400"/>
+            <a:ext cx="5486400" cy="4114800"/>
+          </a:xfrm>
+          <a:prstGeom prst="rect">
+            <a:avLst/>
+          </a:prstGeom>
+        </p:spPr>
+        <p:txBody>
+          <a:bodyPr anchorCtr="0" anchor="t" bIns="91425" lIns="91425" spcFirstLastPara="1" rIns="91425" wrap="square" tIns="91425">
+            <a:noAutofit/>
+          </a:bodyPr>
+          <a:lstStyle/>
+          <a:p>
+            <a:pPr indent="0" lvl="0" marL="0" rtl="0" algn="l">
+              <a:spcBef>
+                <a:spcPts val="0"/>
+              </a:spcBef>
+              <a:spcAft>
+                <a:spcPts val="0"/>
+              </a:spcAft>
+              <a:buNone/>
+            </a:pPr>
+            <a:r>
+              <a:t/>
+            </a:r>
+            <a:endParaRPr/>
+          </a:p>
+        </p:txBody>
+      </p:sp>
+    </p:spTree>
+  </p:cSld>
+  <p:clrMapOvr>
+    <a:masterClrMapping/>
+  </p:clrMapOvr>
+</p:notes>
+</file>
+
+<file path=ppt/notesSlides/notesSlide5.xml><?xml version="1.0" encoding="utf-8"?>
+<p:notes xmlns:a="http://schemas.openxmlformats.org/drawingml/2006/main" xmlns:r="http://schemas.openxmlformats.org/officeDocument/2006/relationships" xmlns:mc="http://schemas.openxmlformats.org/markup-compatibility/2006" xmlns:mv="urn:schemas-microsoft-com:mac:vml" xmlns:p="http://schemas.openxmlformats.org/presentationml/2006/main" xmlns:c="http://schemas.openxmlformats.org/drawingml/2006/chart" xmlns:dgm="http://schemas.openxmlformats.org/drawingml/2006/diagram" xmlns:o="urn:schemas-microsoft-com:office:office" xmlns:v="urn:schemas-microsoft-com:vml" xmlns:pvml="urn:schemas-microsoft-com:office:powerpoint" xmlns:com="http://schemas.openxmlformats.org/drawingml/2006/compatibility" xmlns:p14="http://schemas.microsoft.com/office/powerpoint/2010/main" xmlns:p15="http://schemas.microsoft.com/office/powerpoint/2012/main" xmlns:ahyp="http://schemas.microsoft.com/office/drawing/2018/hyperlinkcolor" showMasterPhAnim="0" showMasterSp="0">
+  <p:cSld>
+    <p:spTree>
+      <p:nvGrpSpPr>
+        <p:cNvPr id="71" name="Shape 71"/>
+        <p:cNvGrpSpPr/>
+        <p:nvPr/>
+      </p:nvGrpSpPr>
+      <p:grpSpPr>
+        <a:xfrm>
+          <a:off x="0" y="0"/>
+          <a:ext cx="0" cy="0"/>
+          <a:chOff x="0" y="0"/>
+          <a:chExt cx="0" cy="0"/>
+        </a:xfrm>
+      </p:grpSpPr>
+      <p:sp>
+        <p:nvSpPr>
+          <p:cNvPr id="72" name="Google Shape;72;g3715ed335dd_0_5:notes"/>
+          <p:cNvSpPr/>
+          <p:nvPr>
+            <p:ph idx="2" type="sldImg"/>
+          </p:nvPr>
+        </p:nvSpPr>
+        <p:spPr>
+          <a:xfrm>
+            <a:off x="381300" y="685800"/>
+            <a:ext cx="6096000" cy="3429000"/>
+          </a:xfrm>
+          <a:custGeom>
+            <a:rect b="b" l="l" r="r" t="t"/>
+            <a:pathLst>
+              <a:path extrusionOk="0" h="120000" w="120000">
+                <a:moveTo>
+                  <a:pt x="0" y="0"/>
+                </a:moveTo>
+                <a:lnTo>
+                  <a:pt x="120000" y="0"/>
+                </a:lnTo>
+                <a:lnTo>
+                  <a:pt x="120000" y="120000"/>
+                </a:lnTo>
+                <a:lnTo>
+                  <a:pt x="0" y="120000"/>
+                </a:lnTo>
+                <a:close/>
+              </a:path>
+            </a:pathLst>
+          </a:custGeom>
+        </p:spPr>
+      </p:sp>
+      <p:sp>
+        <p:nvSpPr>
+          <p:cNvPr id="73" name="Google Shape;73;g3715ed335dd_0_5:notes"/>
           <p:cNvSpPr txBox="1"/>
           <p:nvPr>
             <p:ph idx="1" type="body"/>
@@ -5685,46 +5885,7 @@
             </a:pPr>
             <a:r>
               <a:rPr lang="en"/>
-              <a:t>Basic Python Problems</a:t>
-            </a:r>
-            <a:endParaRPr/>
-          </a:p>
-        </p:txBody>
-      </p:sp>
-      <p:sp>
-        <p:nvSpPr>
-          <p:cNvPr id="55" name="Google Shape;55;p13"/>
-          <p:cNvSpPr txBox="1"/>
-          <p:nvPr>
-            <p:ph idx="1" type="subTitle"/>
-          </p:nvPr>
-        </p:nvSpPr>
-        <p:spPr>
-          <a:xfrm>
-            <a:off x="311700" y="2834125"/>
-            <a:ext cx="8520600" cy="792600"/>
-          </a:xfrm>
-          <a:prstGeom prst="rect">
-            <a:avLst/>
-          </a:prstGeom>
-        </p:spPr>
-        <p:txBody>
-          <a:bodyPr anchorCtr="0" anchor="t" bIns="91425" lIns="91425" spcFirstLastPara="1" rIns="91425" wrap="square" tIns="91425">
-            <a:normAutofit/>
-          </a:bodyPr>
-          <a:lstStyle/>
-          <a:p>
-            <a:pPr indent="0" lvl="0" marL="0" rtl="0" algn="ctr">
-              <a:spcBef>
-                <a:spcPts val="0"/>
-              </a:spcBef>
-              <a:spcAft>
-                <a:spcPts val="0"/>
-              </a:spcAft>
-              <a:buNone/>
-            </a:pPr>
-            <a:r>
-              <a:t/>
+              <a:t>(Somewhat) Basic Python Problems</a:t>
             </a:r>
             <a:endParaRPr/>
           </a:p>
@@ -5743,7 +5904,7 @@
   <p:cSld>
     <p:spTree>
       <p:nvGrpSpPr>
-        <p:cNvPr id="59" name="Shape 59"/>
+        <p:cNvPr id="58" name="Shape 58"/>
         <p:cNvGrpSpPr/>
         <p:nvPr/>
       </p:nvGrpSpPr>
@@ -5757,7 +5918,7 @@
       </p:grpSpPr>
       <p:sp>
         <p:nvSpPr>
-          <p:cNvPr id="60" name="Google Shape;60;p14"/>
+          <p:cNvPr id="59" name="Google Shape;59;p14"/>
           <p:cNvSpPr txBox="1"/>
           <p:nvPr>
             <p:ph idx="1" type="body"/>
@@ -5774,7 +5935,7 @@
         </p:spPr>
         <p:txBody>
           <a:bodyPr anchorCtr="0" anchor="t" bIns="91425" lIns="91425" spcFirstLastPara="1" rIns="91425" wrap="square" tIns="91425">
-            <a:normAutofit fontScale="92500" lnSpcReduction="20000"/>
+            <a:normAutofit fontScale="55000" lnSpcReduction="10000"/>
           </a:bodyPr>
           <a:lstStyle/>
           <a:p>
@@ -5789,7 +5950,7 @@
             </a:pPr>
             <a:r>
               <a:rPr b="1" lang="en" sz="2500" u="sng"/>
-              <a:t>Problem 1</a:t>
+              <a:t>Problem 1 - The ULTIMATE RPS Simulation</a:t>
             </a:r>
             <a:endParaRPr b="1" sz="2500" u="sng"/>
           </a:p>
@@ -5804,8 +5965,12 @@
               <a:buNone/>
             </a:pPr>
             <a:r>
+              <a:rPr b="1" lang="en" sz="2500"/>
+              <a:t>Starting from scratch </a:t>
+            </a:r>
+            <a:r>
               <a:rPr lang="en" sz="2500"/>
-              <a:t>Print the numbers from 1 to a 100.  If the number is divisible by 3, print “Fizz”.  If it is divisible by 5, print “Buzz”.  If it is divisible by both, print “Fizz Buzz”</a:t>
+              <a:t>write a python script that allows you to play rock, paper, scissors against the computer.</a:t>
             </a:r>
             <a:endParaRPr sz="2500"/>
           </a:p>
@@ -5820,7 +5985,32 @@
               <a:buNone/>
             </a:pPr>
             <a:r>
-              <a:t/>
+              <a:rPr i="1" lang="en" sz="2500"/>
+              <a:t>However</a:t>
+            </a:r>
+            <a:r>
+              <a:rPr lang="en" sz="2500"/>
+              <a:t>, in this version you will ask the user how many games they want to play to determine the overall winner.  The computer has other things to do, so it will only accept playing the best of 1 to 9 games.</a:t>
+            </a:r>
+            <a:br>
+              <a:rPr lang="en" sz="2500"/>
+            </a:br>
+            <a:br>
+              <a:rPr lang="en" sz="2500"/>
+            </a:br>
+            <a:r>
+              <a:rPr lang="en" sz="2500"/>
+              <a:t>Example:  How many games would you like to play to determine who is the ultimate winner?  </a:t>
+            </a:r>
+            <a:br>
+              <a:rPr lang="en" sz="2500"/>
+            </a:br>
+            <a:br>
+              <a:rPr lang="en" sz="2500"/>
+            </a:br>
+            <a:r>
+              <a:rPr lang="en" sz="2500"/>
+              <a:t>Implied:  User input can only be an odd number from 1 to 9.  Continue to ask the user to re-enter how many games they would like to play until the user meets these criteria.  </a:t>
             </a:r>
             <a:endParaRPr sz="2500"/>
           </a:p>
@@ -5835,10 +6025,10 @@
               <a:buNone/>
             </a:pPr>
             <a:r>
-              <a:rPr b="1" lang="en" sz="2500" u="sng"/>
-              <a:t>Problem 2</a:t>
+              <a:rPr lang="en" sz="2500"/>
+              <a:t>Also implied:  If the user wants to play the best of 3 games, and wins the first two, they do not need to play a third game.</a:t>
             </a:r>
-            <a:endParaRPr b="1" sz="2500" u="sng"/>
+            <a:endParaRPr sz="2500"/>
           </a:p>
           <a:p>
             <a:pPr indent="0" lvl="0" marL="0" rtl="0" algn="l">
@@ -5851,14 +6041,30 @@
               <a:buNone/>
             </a:pPr>
             <a:r>
-              <a:rPr lang="en" sz="2500"/>
-              <a:t>Ask the user for “rock”, “paper”, or “scissors”.  Randomly assign the computer’s choice of </a:t>
+              <a:rPr b="1" lang="en" sz="2500"/>
+              <a:t>Bonus:  </a:t>
             </a:r>
             <a:r>
               <a:rPr lang="en" sz="2500"/>
-              <a:t>“rock”, “paper”, or “scissors”. Display whether the user won, lost, or tied.</a:t>
+              <a:t>Incorporate ASCII-ART and delays into your game to add some flare.</a:t>
             </a:r>
             <a:endParaRPr sz="2500"/>
+          </a:p>
+          <a:p>
+            <a:pPr indent="0" lvl="0" marL="0" rtl="0" algn="l">
+              <a:spcBef>
+                <a:spcPts val="1200"/>
+              </a:spcBef>
+              <a:spcAft>
+                <a:spcPts val="0"/>
+              </a:spcAft>
+              <a:buNone/>
+            </a:pPr>
+            <a:r>
+              <a:rPr b="1" lang="en" sz="2500" u="sng"/>
+              <a:t>DO NOT USE GENERATIVE AI – PUSH YOURSELF TO FIGURE THIS OUT</a:t>
+            </a:r>
+            <a:endParaRPr b="1" sz="2500" u="sng"/>
           </a:p>
           <a:p>
             <a:pPr indent="0" lvl="0" marL="0" rtl="0" algn="l">
@@ -5905,7 +6111,7 @@
   <p:cSld>
     <p:spTree>
       <p:nvGrpSpPr>
-        <p:cNvPr id="64" name="Shape 64"/>
+        <p:cNvPr id="63" name="Shape 63"/>
         <p:cNvGrpSpPr/>
         <p:nvPr/>
       </p:nvGrpSpPr>
@@ -5919,7 +6125,7 @@
       </p:grpSpPr>
       <p:sp>
         <p:nvSpPr>
-          <p:cNvPr id="65" name="Google Shape;65;p15"/>
+          <p:cNvPr id="64" name="Google Shape;64;p15"/>
           <p:cNvSpPr txBox="1"/>
           <p:nvPr>
             <p:ph idx="1" type="body"/>
@@ -5936,7 +6142,7 @@
         </p:spPr>
         <p:txBody>
           <a:bodyPr anchorCtr="0" anchor="t" bIns="91425" lIns="91425" spcFirstLastPara="1" rIns="91425" wrap="square" tIns="91425">
-            <a:normAutofit fontScale="62500" lnSpcReduction="20000"/>
+            <a:normAutofit/>
           </a:bodyPr>
           <a:lstStyle/>
           <a:p>
@@ -5951,7 +6157,7 @@
             </a:pPr>
             <a:r>
               <a:rPr b="1" lang="en" sz="2500" u="sng"/>
-              <a:t>Problem 3</a:t>
+              <a:t>Problem 1 Assessment</a:t>
             </a:r>
             <a:endParaRPr b="1" sz="2500" u="sng"/>
           </a:p>
@@ -5966,10 +6172,9 @@
               <a:buNone/>
             </a:pPr>
             <a:r>
-              <a:rPr lang="en" sz="2500"/>
-              <a:t>Create a guessing game.  Randomly assign a number from 1 to 100 (using the random module).  Ask the user to guess the number.  If the user guesses higher, display “Too high”.  If the user guesses lower, display “Too low”.  Congratulate the user when they guess the correct number.  Continually ask the user until they get the number correct.</a:t>
+              <a:t/>
             </a:r>
-            <a:endParaRPr sz="2500"/>
+            <a:endParaRPr/>
           </a:p>
           <a:p>
             <a:pPr indent="0" lvl="0" marL="0" rtl="0" algn="l">
@@ -5977,117 +6182,7 @@
                 <a:spcPts val="1200"/>
               </a:spcBef>
               <a:spcAft>
-                <a:spcPts val="0"/>
-              </a:spcAft>
-              <a:buNone/>
-            </a:pPr>
-            <a:r>
-              <a:rPr b="1" lang="en" sz="2500"/>
-              <a:t>Bonus:  </a:t>
-            </a:r>
-            <a:r>
-              <a:rPr lang="en" sz="2500"/>
-              <a:t>Display to the user how many times they guessed.</a:t>
-            </a:r>
-            <a:endParaRPr sz="2500"/>
-          </a:p>
-          <a:p>
-            <a:pPr indent="0" lvl="0" marL="0" rtl="0" algn="l">
-              <a:spcBef>
                 <a:spcPts val="1200"/>
-              </a:spcBef>
-              <a:spcAft>
-                <a:spcPts val="0"/>
-              </a:spcAft>
-              <a:buNone/>
-            </a:pPr>
-            <a:r>
-              <a:t/>
-            </a:r>
-            <a:endParaRPr sz="2500"/>
-          </a:p>
-          <a:p>
-            <a:pPr indent="0" lvl="0" marL="0" rtl="0" algn="l">
-              <a:spcBef>
-                <a:spcPts val="1200"/>
-              </a:spcBef>
-              <a:spcAft>
-                <a:spcPts val="0"/>
-              </a:spcAft>
-              <a:buNone/>
-            </a:pPr>
-            <a:r>
-              <a:rPr b="1" lang="en" sz="2500" u="sng"/>
-              <a:t>Problem 4</a:t>
-            </a:r>
-            <a:r>
-              <a:rPr lang="en" sz="2500"/>
-              <a:t>:</a:t>
-            </a:r>
-            <a:endParaRPr sz="2500"/>
-          </a:p>
-          <a:p>
-            <a:pPr indent="0" lvl="0" marL="0" rtl="0" algn="l">
-              <a:spcBef>
-                <a:spcPts val="1200"/>
-              </a:spcBef>
-              <a:spcAft>
-                <a:spcPts val="0"/>
-              </a:spcAft>
-              <a:buNone/>
-            </a:pPr>
-            <a:r>
-              <a:rPr lang="en" sz="2500"/>
-              <a:t>Write a program to help you track your student’s grades.  Ask the user how </a:t>
-            </a:r>
-            <a:r>
-              <a:rPr lang="en" sz="2500"/>
-              <a:t>many</a:t>
-            </a:r>
-            <a:r>
-              <a:rPr lang="en" sz="2500"/>
-              <a:t> students are in the class.  For each student, ask their name and their grade.  Display the class average.  Display the highest grade in the class. Display the lowest grade in the class.</a:t>
-            </a:r>
-            <a:endParaRPr sz="2500"/>
-          </a:p>
-          <a:p>
-            <a:pPr indent="0" lvl="0" marL="0" rtl="0" algn="l">
-              <a:spcBef>
-                <a:spcPts val="1200"/>
-              </a:spcBef>
-              <a:spcAft>
-                <a:spcPts val="0"/>
-              </a:spcAft>
-              <a:buNone/>
-            </a:pPr>
-            <a:br>
-              <a:rPr lang="en" sz="2500"/>
-            </a:br>
-            <a:r>
-              <a:rPr b="1" lang="en" sz="2500"/>
-              <a:t>Bonus:  </a:t>
-            </a:r>
-            <a:r>
-              <a:rPr lang="en" sz="2500"/>
-              <a:t>Display who got the </a:t>
-            </a:r>
-            <a:r>
-              <a:rPr lang="en" sz="2500"/>
-              <a:t>highest</a:t>
-            </a:r>
-            <a:r>
-              <a:rPr lang="en" sz="2500"/>
-              <a:t> grade in the class.</a:t>
-            </a:r>
-            <a:endParaRPr sz="2500"/>
-          </a:p>
-          <a:p>
-            <a:pPr indent="0" lvl="0" marL="0" rtl="0" algn="l">
-              <a:spcBef>
-                <a:spcPts val="1200"/>
-              </a:spcBef>
-              <a:spcAft>
-                <a:spcPts val="0"/>
               </a:spcAft>
               <a:buNone/>
             </a:pPr>
@@ -6095,6 +6190,532 @@
               <a:t/>
             </a:r>
             <a:endParaRPr/>
+          </a:p>
+        </p:txBody>
+      </p:sp>
+      <p:graphicFrame>
+        <p:nvGraphicFramePr>
+          <p:cNvPr id="65" name="Google Shape;65;p15"/>
+          <p:cNvGraphicFramePr/>
+          <p:nvPr/>
+        </p:nvGraphicFramePr>
+        <p:xfrm>
+          <a:off x="952500" y="1123450"/>
+          <a:ext cx="3000000" cy="3000000"/>
+        </p:xfrm>
+        <a:graphic>
+          <a:graphicData uri="http://schemas.openxmlformats.org/drawingml/2006/table">
+            <a:tbl>
+              <a:tblPr>
+                <a:noFill/>
+                <a:tableStyleId>{6585C21F-069E-4A50-B68A-426B407AB505}</a:tableStyleId>
+              </a:tblPr>
+              <a:tblGrid>
+                <a:gridCol w="977650"/>
+                <a:gridCol w="6261350"/>
+              </a:tblGrid>
+              <a:tr h="381000">
+                <a:tc>
+                  <a:txBody>
+                    <a:bodyPr/>
+                    <a:lstStyle/>
+                    <a:p>
+                      <a:pPr indent="0" lvl="0" marL="0" rtl="0" algn="l">
+                        <a:spcBef>
+                          <a:spcPts val="0"/>
+                        </a:spcBef>
+                        <a:spcAft>
+                          <a:spcPts val="0"/>
+                        </a:spcAft>
+                        <a:buNone/>
+                      </a:pPr>
+                      <a:r>
+                        <a:rPr lang="en"/>
+                        <a:t>Grade</a:t>
+                      </a:r>
+                      <a:endParaRPr/>
+                    </a:p>
+                  </a:txBody>
+                  <a:tcPr marT="91425" marB="91425" marR="91425" marL="91425"/>
+                </a:tc>
+                <a:tc>
+                  <a:txBody>
+                    <a:bodyPr/>
+                    <a:lstStyle/>
+                    <a:p>
+                      <a:pPr indent="0" lvl="0" marL="0" rtl="0" algn="l">
+                        <a:spcBef>
+                          <a:spcPts val="0"/>
+                        </a:spcBef>
+                        <a:spcAft>
+                          <a:spcPts val="0"/>
+                        </a:spcAft>
+                        <a:buNone/>
+                      </a:pPr>
+                      <a:r>
+                        <a:rPr lang="en"/>
+                        <a:t>Criteria</a:t>
+                      </a:r>
+                      <a:endParaRPr/>
+                    </a:p>
+                  </a:txBody>
+                  <a:tcPr marT="91425" marB="91425" marR="91425" marL="91425"/>
+                </a:tc>
+              </a:tr>
+              <a:tr h="381000">
+                <a:tc>
+                  <a:txBody>
+                    <a:bodyPr/>
+                    <a:lstStyle/>
+                    <a:p>
+                      <a:pPr indent="0" lvl="0" marL="0" rtl="0" algn="l">
+                        <a:spcBef>
+                          <a:spcPts val="0"/>
+                        </a:spcBef>
+                        <a:spcAft>
+                          <a:spcPts val="0"/>
+                        </a:spcAft>
+                        <a:buNone/>
+                      </a:pPr>
+                      <a:r>
+                        <a:rPr lang="en"/>
+                        <a:t>D</a:t>
+                      </a:r>
+                      <a:endParaRPr/>
+                    </a:p>
+                  </a:txBody>
+                  <a:tcPr marT="91425" marB="91425" marR="91425" marL="91425"/>
+                </a:tc>
+                <a:tc>
+                  <a:txBody>
+                    <a:bodyPr/>
+                    <a:lstStyle/>
+                    <a:p>
+                      <a:pPr indent="0" lvl="0" marL="0" rtl="0" algn="l">
+                        <a:spcBef>
+                          <a:spcPts val="0"/>
+                        </a:spcBef>
+                        <a:spcAft>
+                          <a:spcPts val="0"/>
+                        </a:spcAft>
+                        <a:buNone/>
+                      </a:pPr>
+                      <a:r>
+                        <a:rPr lang="en"/>
+                        <a:t>You can play one game of RPS against the computer.</a:t>
+                      </a:r>
+                      <a:endParaRPr/>
+                    </a:p>
+                  </a:txBody>
+                  <a:tcPr marT="91425" marB="91425" marR="91425" marL="91425"/>
+                </a:tc>
+              </a:tr>
+              <a:tr h="381000">
+                <a:tc>
+                  <a:txBody>
+                    <a:bodyPr/>
+                    <a:lstStyle/>
+                    <a:p>
+                      <a:pPr indent="0" lvl="0" marL="0" rtl="0" algn="l">
+                        <a:spcBef>
+                          <a:spcPts val="0"/>
+                        </a:spcBef>
+                        <a:spcAft>
+                          <a:spcPts val="0"/>
+                        </a:spcAft>
+                        <a:buNone/>
+                      </a:pPr>
+                      <a:r>
+                        <a:rPr lang="en"/>
+                        <a:t>C</a:t>
+                      </a:r>
+                      <a:endParaRPr/>
+                    </a:p>
+                  </a:txBody>
+                  <a:tcPr marT="91425" marB="91425" marR="91425" marL="91425"/>
+                </a:tc>
+                <a:tc>
+                  <a:txBody>
+                    <a:bodyPr/>
+                    <a:lstStyle/>
+                    <a:p>
+                      <a:pPr indent="0" lvl="0" marL="0" rtl="0" algn="l">
+                        <a:spcBef>
+                          <a:spcPts val="0"/>
+                        </a:spcBef>
+                        <a:spcAft>
+                          <a:spcPts val="0"/>
+                        </a:spcAft>
+                        <a:buNone/>
+                      </a:pPr>
+                      <a:r>
+                        <a:rPr lang="en"/>
+                        <a:t>You can specify the number of games to play, but the computer plays all of the games without determining “best of” the number of games.</a:t>
+                      </a:r>
+                      <a:endParaRPr/>
+                    </a:p>
+                  </a:txBody>
+                  <a:tcPr marT="91425" marB="91425" marR="91425" marL="91425"/>
+                </a:tc>
+              </a:tr>
+              <a:tr h="381000">
+                <a:tc>
+                  <a:txBody>
+                    <a:bodyPr/>
+                    <a:lstStyle/>
+                    <a:p>
+                      <a:pPr indent="0" lvl="0" marL="0" rtl="0" algn="l">
+                        <a:spcBef>
+                          <a:spcPts val="0"/>
+                        </a:spcBef>
+                        <a:spcAft>
+                          <a:spcPts val="0"/>
+                        </a:spcAft>
+                        <a:buNone/>
+                      </a:pPr>
+                      <a:r>
+                        <a:rPr lang="en"/>
+                        <a:t>B</a:t>
+                      </a:r>
+                      <a:endParaRPr/>
+                    </a:p>
+                  </a:txBody>
+                  <a:tcPr marT="91425" marB="91425" marR="91425" marL="91425"/>
+                </a:tc>
+                <a:tc>
+                  <a:txBody>
+                    <a:bodyPr/>
+                    <a:lstStyle/>
+                    <a:p>
+                      <a:pPr indent="0" lvl="0" marL="0" rtl="0" algn="l">
+                        <a:spcBef>
+                          <a:spcPts val="0"/>
+                        </a:spcBef>
+                        <a:spcAft>
+                          <a:spcPts val="0"/>
+                        </a:spcAft>
+                        <a:buNone/>
+                      </a:pPr>
+                      <a:r>
+                        <a:rPr lang="en"/>
+                        <a:t>Input is validated correctly, so only 1, 3, 5, 7, or 9 games can be played.</a:t>
+                      </a:r>
+                      <a:endParaRPr/>
+                    </a:p>
+                  </a:txBody>
+                  <a:tcPr marT="91425" marB="91425" marR="91425" marL="91425"/>
+                </a:tc>
+              </a:tr>
+              <a:tr h="381000">
+                <a:tc>
+                  <a:txBody>
+                    <a:bodyPr/>
+                    <a:lstStyle/>
+                    <a:p>
+                      <a:pPr indent="0" lvl="0" marL="0" rtl="0" algn="l">
+                        <a:spcBef>
+                          <a:spcPts val="0"/>
+                        </a:spcBef>
+                        <a:spcAft>
+                          <a:spcPts val="0"/>
+                        </a:spcAft>
+                        <a:buNone/>
+                      </a:pPr>
+                      <a:r>
+                        <a:rPr lang="en"/>
+                        <a:t>A</a:t>
+                      </a:r>
+                      <a:endParaRPr/>
+                    </a:p>
+                  </a:txBody>
+                  <a:tcPr marT="91425" marB="91425" marR="91425" marL="91425"/>
+                </a:tc>
+                <a:tc>
+                  <a:txBody>
+                    <a:bodyPr/>
+                    <a:lstStyle/>
+                    <a:p>
+                      <a:pPr indent="0" lvl="0" marL="0" rtl="0" algn="l">
+                        <a:spcBef>
+                          <a:spcPts val="0"/>
+                        </a:spcBef>
+                        <a:spcAft>
+                          <a:spcPts val="0"/>
+                        </a:spcAft>
+                        <a:buNone/>
+                      </a:pPr>
+                      <a:r>
+                        <a:rPr lang="en"/>
+                        <a:t>Input is validated correctly, and the game incorporates best-of analysis (i.e. if the user wants to play 3 games and wins the first 2, the third game will not be played.</a:t>
+                      </a:r>
+                      <a:endParaRPr/>
+                    </a:p>
+                  </a:txBody>
+                  <a:tcPr marT="91425" marB="91425" marR="91425" marL="91425"/>
+                </a:tc>
+              </a:tr>
+              <a:tr h="381000">
+                <a:tc>
+                  <a:txBody>
+                    <a:bodyPr/>
+                    <a:lstStyle/>
+                    <a:p>
+                      <a:pPr indent="0" lvl="0" marL="0" rtl="0" algn="l">
+                        <a:spcBef>
+                          <a:spcPts val="0"/>
+                        </a:spcBef>
+                        <a:spcAft>
+                          <a:spcPts val="0"/>
+                        </a:spcAft>
+                        <a:buNone/>
+                      </a:pPr>
+                      <a:r>
+                        <a:rPr lang="en"/>
+                        <a:t>A+</a:t>
+                      </a:r>
+                      <a:endParaRPr/>
+                    </a:p>
+                  </a:txBody>
+                  <a:tcPr marT="91425" marB="91425" marR="91425" marL="91425"/>
+                </a:tc>
+                <a:tc>
+                  <a:txBody>
+                    <a:bodyPr/>
+                    <a:lstStyle/>
+                    <a:p>
+                      <a:pPr indent="0" lvl="0" marL="0" rtl="0" algn="l">
+                        <a:spcBef>
+                          <a:spcPts val="0"/>
+                        </a:spcBef>
+                        <a:spcAft>
+                          <a:spcPts val="0"/>
+                        </a:spcAft>
+                        <a:buNone/>
+                      </a:pPr>
+                      <a:r>
+                        <a:rPr lang="en"/>
+                        <a:t>Added ASCII Art</a:t>
+                      </a:r>
+                      <a:endParaRPr/>
+                    </a:p>
+                  </a:txBody>
+                  <a:tcPr marT="91425" marB="91425" marR="91425" marL="91425"/>
+                </a:tc>
+              </a:tr>
+            </a:tbl>
+          </a:graphicData>
+        </a:graphic>
+      </p:graphicFrame>
+    </p:spTree>
+  </p:cSld>
+  <p:clrMapOvr>
+    <a:masterClrMapping/>
+  </p:clrMapOvr>
+</p:sld>
+</file>
+
+<file path=ppt/slides/slide4.xml><?xml version="1.0" encoding="utf-8"?>
+<p:sld xmlns:a="http://schemas.openxmlformats.org/drawingml/2006/main" xmlns:r="http://schemas.openxmlformats.org/officeDocument/2006/relationships" xmlns:mc="http://schemas.openxmlformats.org/markup-compatibility/2006" xmlns:mv="urn:schemas-microsoft-com:mac:vml" xmlns:p="http://schemas.openxmlformats.org/presentationml/2006/main" xmlns:c="http://schemas.openxmlformats.org/drawingml/2006/chart" xmlns:dgm="http://schemas.openxmlformats.org/drawingml/2006/diagram" xmlns:o="urn:schemas-microsoft-com:office:office" xmlns:v="urn:schemas-microsoft-com:vml" xmlns:pvml="urn:schemas-microsoft-com:office:powerpoint" xmlns:com="http://schemas.openxmlformats.org/drawingml/2006/compatibility" xmlns:p14="http://schemas.microsoft.com/office/powerpoint/2010/main" xmlns:p15="http://schemas.microsoft.com/office/powerpoint/2012/main" xmlns:ahyp="http://schemas.microsoft.com/office/drawing/2018/hyperlinkcolor">
+  <p:cSld>
+    <p:spTree>
+      <p:nvGrpSpPr>
+        <p:cNvPr id="69" name="Shape 69"/>
+        <p:cNvGrpSpPr/>
+        <p:nvPr/>
+      </p:nvGrpSpPr>
+      <p:grpSpPr>
+        <a:xfrm>
+          <a:off x="0" y="0"/>
+          <a:ext cx="0" cy="0"/>
+          <a:chOff x="0" y="0"/>
+          <a:chExt cx="0" cy="0"/>
+        </a:xfrm>
+      </p:grpSpPr>
+      <p:sp>
+        <p:nvSpPr>
+          <p:cNvPr id="70" name="Google Shape;70;p16"/>
+          <p:cNvSpPr txBox="1"/>
+          <p:nvPr>
+            <p:ph idx="1" type="body"/>
+          </p:nvPr>
+        </p:nvSpPr>
+        <p:spPr>
+          <a:xfrm>
+            <a:off x="311700" y="213675"/>
+            <a:ext cx="8520600" cy="4742700"/>
+          </a:xfrm>
+          <a:prstGeom prst="rect">
+            <a:avLst/>
+          </a:prstGeom>
+        </p:spPr>
+        <p:txBody>
+          <a:bodyPr anchorCtr="0" anchor="t" bIns="91425" lIns="91425" spcFirstLastPara="1" rIns="91425" wrap="square" tIns="91425">
+            <a:normAutofit fontScale="32500"/>
+          </a:bodyPr>
+          <a:lstStyle/>
+          <a:p>
+            <a:pPr indent="0" lvl="0" marL="0" rtl="0" algn="l">
+              <a:spcBef>
+                <a:spcPts val="0"/>
+              </a:spcBef>
+              <a:spcAft>
+                <a:spcPts val="0"/>
+              </a:spcAft>
+              <a:buNone/>
+            </a:pPr>
+            <a:r>
+              <a:rPr b="1" lang="en" sz="4015" u="sng"/>
+              <a:t>Problem 2 - Pizza Shop Shenanigans</a:t>
+            </a:r>
+            <a:endParaRPr b="1" sz="4015" u="sng"/>
+          </a:p>
+          <a:p>
+            <a:pPr indent="0" lvl="0" marL="0" rtl="0" algn="l">
+              <a:spcBef>
+                <a:spcPts val="1200"/>
+              </a:spcBef>
+              <a:spcAft>
+                <a:spcPts val="0"/>
+              </a:spcAft>
+              <a:buNone/>
+            </a:pPr>
+            <a:r>
+              <a:rPr lang="en" sz="4015"/>
+              <a:t>Your local pizza shop (“Byte da Pi”) is rolling out so-called ‘deals’ on the regular, but you’ve become suspicious if they are </a:t>
+            </a:r>
+            <a:r>
+              <a:rPr i="1" lang="en" sz="4015"/>
+              <a:t>actually deals</a:t>
+            </a:r>
+            <a:r>
+              <a:rPr lang="en" sz="4015"/>
+              <a:t>.</a:t>
+            </a:r>
+            <a:endParaRPr sz="4015"/>
+          </a:p>
+          <a:p>
+            <a:pPr indent="0" lvl="0" marL="0" rtl="0" algn="l">
+              <a:spcBef>
+                <a:spcPts val="1200"/>
+              </a:spcBef>
+              <a:spcAft>
+                <a:spcPts val="0"/>
+              </a:spcAft>
+              <a:buNone/>
+            </a:pPr>
+            <a:r>
+              <a:rPr lang="en" sz="4015"/>
+              <a:t>For instance, this week Byte da Pi is offering two small pizzas (10” diameter) for $19.99.  However, their regular priced large pizza (16” diameter) is priced $20.99.  Are the two small pizzas really a deal at $19.99?</a:t>
+            </a:r>
+            <a:endParaRPr sz="4015"/>
+          </a:p>
+          <a:p>
+            <a:pPr indent="0" lvl="0" marL="0" rtl="0" algn="l">
+              <a:spcBef>
+                <a:spcPts val="1200"/>
+              </a:spcBef>
+              <a:spcAft>
+                <a:spcPts val="0"/>
+              </a:spcAft>
+              <a:buNone/>
+            </a:pPr>
+            <a:r>
+              <a:rPr lang="en" sz="4015"/>
+              <a:t>Implied:  You need to determine the area of the pizzas.</a:t>
+            </a:r>
+            <a:endParaRPr sz="4015"/>
+          </a:p>
+          <a:p>
+            <a:pPr indent="0" lvl="0" marL="0" rtl="0" algn="l">
+              <a:spcBef>
+                <a:spcPts val="1200"/>
+              </a:spcBef>
+              <a:spcAft>
+                <a:spcPts val="0"/>
+              </a:spcAft>
+              <a:buNone/>
+            </a:pPr>
+            <a:r>
+              <a:rPr lang="en" sz="4015"/>
+              <a:t>Solve for this specific deal, and then create two functions to help you solve for </a:t>
+            </a:r>
+            <a:r>
+              <a:rPr i="1" lang="en" sz="4015"/>
+              <a:t>any</a:t>
+            </a:r>
+            <a:r>
+              <a:rPr lang="en" sz="4015"/>
+              <a:t> deal.</a:t>
+            </a:r>
+            <a:endParaRPr sz="4015"/>
+          </a:p>
+          <a:p>
+            <a:pPr indent="0" lvl="0" marL="0" rtl="0" algn="l">
+              <a:spcBef>
+                <a:spcPts val="1200"/>
+              </a:spcBef>
+              <a:spcAft>
+                <a:spcPts val="0"/>
+              </a:spcAft>
+              <a:buNone/>
+            </a:pPr>
+            <a:r>
+              <a:rPr lang="en" sz="4015"/>
+              <a:t>The first function should determine the price per square inch of pizza.  </a:t>
+            </a:r>
+            <a:r>
+              <a:rPr b="1" lang="en" sz="4015"/>
+              <a:t>How many parameters will this function have?</a:t>
+            </a:r>
+            <a:endParaRPr b="1" sz="4015"/>
+          </a:p>
+          <a:p>
+            <a:pPr indent="0" lvl="0" marL="0" rtl="0" algn="l">
+              <a:spcBef>
+                <a:spcPts val="1200"/>
+              </a:spcBef>
+              <a:spcAft>
+                <a:spcPts val="0"/>
+              </a:spcAft>
+              <a:buNone/>
+            </a:pPr>
+            <a:r>
+              <a:rPr lang="en" sz="4015"/>
+              <a:t>The second function should compare deals based on $/in</a:t>
+            </a:r>
+            <a:r>
+              <a:rPr baseline="30000" lang="en" sz="4015"/>
+              <a:t>2</a:t>
+            </a:r>
+            <a:r>
+              <a:rPr lang="en" sz="4015"/>
+              <a:t> and quantity of pizzas offered in the deal.  </a:t>
+            </a:r>
+            <a:r>
+              <a:rPr b="1" lang="en" sz="4015"/>
+              <a:t>This function should have four parameters. What are they?</a:t>
+            </a:r>
+            <a:endParaRPr b="1" sz="4015"/>
+          </a:p>
+          <a:p>
+            <a:pPr indent="0" lvl="0" marL="0" rtl="0" algn="l">
+              <a:spcBef>
+                <a:spcPts val="1200"/>
+              </a:spcBef>
+              <a:spcAft>
+                <a:spcPts val="0"/>
+              </a:spcAft>
+              <a:buNone/>
+            </a:pPr>
+            <a:r>
+              <a:rPr b="1" lang="en" sz="4015"/>
+              <a:t>BONUS:  </a:t>
+            </a:r>
+            <a:r>
+              <a:rPr lang="en" sz="4015"/>
+              <a:t>If your program finds it to be a good deal, your python script should open the webpage of a local pizza shop.  If your program finds it to be a bad deal, tell the user, and open the webpage of a pizza chain (Dominoes/Papa Johns…).  Also add ASCII Art.</a:t>
+            </a:r>
+            <a:endParaRPr sz="4015"/>
           </a:p>
           <a:p>
             <a:pPr indent="0" lvl="0" marL="0" rtl="0" algn="l">
@@ -6121,7 +6742,694 @@
 </p:sld>
 </file>
 
+<file path=ppt/slides/slide5.xml><?xml version="1.0" encoding="utf-8"?>
+<p:sld xmlns:a="http://schemas.openxmlformats.org/drawingml/2006/main" xmlns:r="http://schemas.openxmlformats.org/officeDocument/2006/relationships" xmlns:mc="http://schemas.openxmlformats.org/markup-compatibility/2006" xmlns:mv="urn:schemas-microsoft-com:mac:vml" xmlns:p="http://schemas.openxmlformats.org/presentationml/2006/main" xmlns:c="http://schemas.openxmlformats.org/drawingml/2006/chart" xmlns:dgm="http://schemas.openxmlformats.org/drawingml/2006/diagram" xmlns:o="urn:schemas-microsoft-com:office:office" xmlns:v="urn:schemas-microsoft-com:vml" xmlns:pvml="urn:schemas-microsoft-com:office:powerpoint" xmlns:com="http://schemas.openxmlformats.org/drawingml/2006/compatibility" xmlns:p14="http://schemas.microsoft.com/office/powerpoint/2010/main" xmlns:p15="http://schemas.microsoft.com/office/powerpoint/2012/main" xmlns:ahyp="http://schemas.microsoft.com/office/drawing/2018/hyperlinkcolor">
+  <p:cSld>
+    <p:spTree>
+      <p:nvGrpSpPr>
+        <p:cNvPr id="74" name="Shape 74"/>
+        <p:cNvGrpSpPr/>
+        <p:nvPr/>
+      </p:nvGrpSpPr>
+      <p:grpSpPr>
+        <a:xfrm>
+          <a:off x="0" y="0"/>
+          <a:ext cx="0" cy="0"/>
+          <a:chOff x="0" y="0"/>
+          <a:chExt cx="0" cy="0"/>
+        </a:xfrm>
+      </p:grpSpPr>
+      <p:sp>
+        <p:nvSpPr>
+          <p:cNvPr id="75" name="Google Shape;75;p17"/>
+          <p:cNvSpPr txBox="1"/>
+          <p:nvPr>
+            <p:ph idx="1" type="body"/>
+          </p:nvPr>
+        </p:nvSpPr>
+        <p:spPr>
+          <a:xfrm>
+            <a:off x="311700" y="213675"/>
+            <a:ext cx="8520600" cy="4742700"/>
+          </a:xfrm>
+          <a:prstGeom prst="rect">
+            <a:avLst/>
+          </a:prstGeom>
+        </p:spPr>
+        <p:txBody>
+          <a:bodyPr anchorCtr="0" anchor="t" bIns="91425" lIns="91425" spcFirstLastPara="1" rIns="91425" wrap="square" tIns="91425">
+            <a:normAutofit/>
+          </a:bodyPr>
+          <a:lstStyle/>
+          <a:p>
+            <a:pPr indent="0" lvl="0" marL="0" rtl="0" algn="l">
+              <a:spcBef>
+                <a:spcPts val="0"/>
+              </a:spcBef>
+              <a:spcAft>
+                <a:spcPts val="0"/>
+              </a:spcAft>
+              <a:buNone/>
+            </a:pPr>
+            <a:r>
+              <a:rPr b="1" lang="en" sz="2500" u="sng"/>
+              <a:t>Problem 2 Assessment</a:t>
+            </a:r>
+            <a:endParaRPr b="1" sz="2500" u="sng"/>
+          </a:p>
+          <a:p>
+            <a:pPr indent="0" lvl="0" marL="0" rtl="0" algn="l">
+              <a:spcBef>
+                <a:spcPts val="1200"/>
+              </a:spcBef>
+              <a:spcAft>
+                <a:spcPts val="0"/>
+              </a:spcAft>
+              <a:buNone/>
+            </a:pPr>
+            <a:r>
+              <a:t/>
+            </a:r>
+            <a:endParaRPr/>
+          </a:p>
+          <a:p>
+            <a:pPr indent="0" lvl="0" marL="0" rtl="0" algn="l">
+              <a:spcBef>
+                <a:spcPts val="1200"/>
+              </a:spcBef>
+              <a:spcAft>
+                <a:spcPts val="1200"/>
+              </a:spcAft>
+              <a:buNone/>
+            </a:pPr>
+            <a:r>
+              <a:t/>
+            </a:r>
+            <a:endParaRPr/>
+          </a:p>
+        </p:txBody>
+      </p:sp>
+      <p:graphicFrame>
+        <p:nvGraphicFramePr>
+          <p:cNvPr id="76" name="Google Shape;76;p17"/>
+          <p:cNvGraphicFramePr/>
+          <p:nvPr/>
+        </p:nvGraphicFramePr>
+        <p:xfrm>
+          <a:off x="952500" y="1123450"/>
+          <a:ext cx="3000000" cy="3000000"/>
+        </p:xfrm>
+        <a:graphic>
+          <a:graphicData uri="http://schemas.openxmlformats.org/drawingml/2006/table">
+            <a:tbl>
+              <a:tblPr>
+                <a:noFill/>
+                <a:tableStyleId>{6585C21F-069E-4A50-B68A-426B407AB505}</a:tableStyleId>
+              </a:tblPr>
+              <a:tblGrid>
+                <a:gridCol w="977650"/>
+                <a:gridCol w="6261350"/>
+              </a:tblGrid>
+              <a:tr h="381000">
+                <a:tc>
+                  <a:txBody>
+                    <a:bodyPr/>
+                    <a:lstStyle/>
+                    <a:p>
+                      <a:pPr indent="0" lvl="0" marL="0" rtl="0" algn="l">
+                        <a:spcBef>
+                          <a:spcPts val="0"/>
+                        </a:spcBef>
+                        <a:spcAft>
+                          <a:spcPts val="0"/>
+                        </a:spcAft>
+                        <a:buNone/>
+                      </a:pPr>
+                      <a:r>
+                        <a:rPr lang="en"/>
+                        <a:t>Grade</a:t>
+                      </a:r>
+                      <a:endParaRPr/>
+                    </a:p>
+                  </a:txBody>
+                  <a:tcPr marT="91425" marB="91425" marR="91425" marL="91425"/>
+                </a:tc>
+                <a:tc>
+                  <a:txBody>
+                    <a:bodyPr/>
+                    <a:lstStyle/>
+                    <a:p>
+                      <a:pPr indent="0" lvl="0" marL="0" rtl="0" algn="l">
+                        <a:spcBef>
+                          <a:spcPts val="0"/>
+                        </a:spcBef>
+                        <a:spcAft>
+                          <a:spcPts val="0"/>
+                        </a:spcAft>
+                        <a:buNone/>
+                      </a:pPr>
+                      <a:r>
+                        <a:rPr lang="en"/>
+                        <a:t>Criteria</a:t>
+                      </a:r>
+                      <a:endParaRPr/>
+                    </a:p>
+                  </a:txBody>
+                  <a:tcPr marT="91425" marB="91425" marR="91425" marL="91425"/>
+                </a:tc>
+              </a:tr>
+              <a:tr h="381000">
+                <a:tc>
+                  <a:txBody>
+                    <a:bodyPr/>
+                    <a:lstStyle/>
+                    <a:p>
+                      <a:pPr indent="0" lvl="0" marL="0" rtl="0" algn="l">
+                        <a:spcBef>
+                          <a:spcPts val="0"/>
+                        </a:spcBef>
+                        <a:spcAft>
+                          <a:spcPts val="0"/>
+                        </a:spcAft>
+                        <a:buNone/>
+                      </a:pPr>
+                      <a:r>
+                        <a:rPr lang="en"/>
+                        <a:t>D</a:t>
+                      </a:r>
+                      <a:endParaRPr/>
+                    </a:p>
+                  </a:txBody>
+                  <a:tcPr marT="91425" marB="91425" marR="91425" marL="91425"/>
+                </a:tc>
+                <a:tc>
+                  <a:txBody>
+                    <a:bodyPr/>
+                    <a:lstStyle/>
+                    <a:p>
+                      <a:pPr indent="0" lvl="0" marL="0" rtl="0" algn="l">
+                        <a:spcBef>
+                          <a:spcPts val="0"/>
+                        </a:spcBef>
+                        <a:spcAft>
+                          <a:spcPts val="0"/>
+                        </a:spcAft>
+                        <a:buNone/>
+                      </a:pPr>
+                      <a:r>
+                        <a:rPr lang="en"/>
+                        <a:t>You correctly solve the given deal</a:t>
+                      </a:r>
+                      <a:endParaRPr/>
+                    </a:p>
+                  </a:txBody>
+                  <a:tcPr marT="91425" marB="91425" marR="91425" marL="91425"/>
+                </a:tc>
+              </a:tr>
+              <a:tr h="381000">
+                <a:tc>
+                  <a:txBody>
+                    <a:bodyPr/>
+                    <a:lstStyle/>
+                    <a:p>
+                      <a:pPr indent="0" lvl="0" marL="0" rtl="0" algn="l">
+                        <a:spcBef>
+                          <a:spcPts val="0"/>
+                        </a:spcBef>
+                        <a:spcAft>
+                          <a:spcPts val="0"/>
+                        </a:spcAft>
+                        <a:buNone/>
+                      </a:pPr>
+                      <a:r>
+                        <a:rPr lang="en"/>
+                        <a:t>C</a:t>
+                      </a:r>
+                      <a:endParaRPr/>
+                    </a:p>
+                  </a:txBody>
+                  <a:tcPr marT="91425" marB="91425" marR="91425" marL="91425"/>
+                </a:tc>
+                <a:tc>
+                  <a:txBody>
+                    <a:bodyPr/>
+                    <a:lstStyle/>
+                    <a:p>
+                      <a:pPr indent="0" lvl="0" marL="0" rtl="0" algn="l">
+                        <a:spcBef>
+                          <a:spcPts val="0"/>
+                        </a:spcBef>
+                        <a:spcAft>
+                          <a:spcPts val="0"/>
+                        </a:spcAft>
+                        <a:buNone/>
+                      </a:pPr>
+                      <a:r>
+                        <a:rPr lang="en"/>
+                        <a:t>You write a function to determine price per in squared.</a:t>
+                      </a:r>
+                      <a:endParaRPr/>
+                    </a:p>
+                  </a:txBody>
+                  <a:tcPr marT="91425" marB="91425" marR="91425" marL="91425"/>
+                </a:tc>
+              </a:tr>
+              <a:tr h="381000">
+                <a:tc>
+                  <a:txBody>
+                    <a:bodyPr/>
+                    <a:lstStyle/>
+                    <a:p>
+                      <a:pPr indent="0" lvl="0" marL="0" rtl="0" algn="l">
+                        <a:spcBef>
+                          <a:spcPts val="0"/>
+                        </a:spcBef>
+                        <a:spcAft>
+                          <a:spcPts val="0"/>
+                        </a:spcAft>
+                        <a:buNone/>
+                      </a:pPr>
+                      <a:r>
+                        <a:rPr lang="en"/>
+                        <a:t>B</a:t>
+                      </a:r>
+                      <a:endParaRPr/>
+                    </a:p>
+                  </a:txBody>
+                  <a:tcPr marT="91425" marB="91425" marR="91425" marL="91425"/>
+                </a:tc>
+                <a:tc>
+                  <a:txBody>
+                    <a:bodyPr/>
+                    <a:lstStyle/>
+                    <a:p>
+                      <a:pPr indent="0" lvl="0" marL="0" rtl="0" algn="l">
+                        <a:spcBef>
+                          <a:spcPts val="0"/>
+                        </a:spcBef>
+                        <a:spcAft>
+                          <a:spcPts val="0"/>
+                        </a:spcAft>
+                        <a:buNone/>
+                      </a:pPr>
+                      <a:r>
+                        <a:rPr lang="en"/>
+                        <a:t>You write a function to compare prices and quantity of pizzas.</a:t>
+                      </a:r>
+                      <a:endParaRPr/>
+                    </a:p>
+                  </a:txBody>
+                  <a:tcPr marT="91425" marB="91425" marR="91425" marL="91425"/>
+                </a:tc>
+              </a:tr>
+              <a:tr h="381000">
+                <a:tc>
+                  <a:txBody>
+                    <a:bodyPr/>
+                    <a:lstStyle/>
+                    <a:p>
+                      <a:pPr indent="0" lvl="0" marL="0" rtl="0" algn="l">
+                        <a:spcBef>
+                          <a:spcPts val="0"/>
+                        </a:spcBef>
+                        <a:spcAft>
+                          <a:spcPts val="0"/>
+                        </a:spcAft>
+                        <a:buNone/>
+                      </a:pPr>
+                      <a:r>
+                        <a:rPr lang="en"/>
+                        <a:t>A</a:t>
+                      </a:r>
+                      <a:endParaRPr/>
+                    </a:p>
+                  </a:txBody>
+                  <a:tcPr marT="91425" marB="91425" marR="91425" marL="91425"/>
+                </a:tc>
+                <a:tc>
+                  <a:txBody>
+                    <a:bodyPr/>
+                    <a:lstStyle/>
+                    <a:p>
+                      <a:pPr indent="0" lvl="0" marL="0" rtl="0" algn="l">
+                        <a:spcBef>
+                          <a:spcPts val="0"/>
+                        </a:spcBef>
+                        <a:spcAft>
+                          <a:spcPts val="0"/>
+                        </a:spcAft>
+                        <a:buNone/>
+                      </a:pPr>
+                      <a:r>
+                        <a:rPr lang="en"/>
+                        <a:t>Your python script successfully opens webpages based on the outcome.</a:t>
+                      </a:r>
+                      <a:endParaRPr/>
+                    </a:p>
+                  </a:txBody>
+                  <a:tcPr marT="91425" marB="91425" marR="91425" marL="91425"/>
+                </a:tc>
+              </a:tr>
+              <a:tr h="381000">
+                <a:tc>
+                  <a:txBody>
+                    <a:bodyPr/>
+                    <a:lstStyle/>
+                    <a:p>
+                      <a:pPr indent="0" lvl="0" marL="0" rtl="0" algn="l">
+                        <a:spcBef>
+                          <a:spcPts val="0"/>
+                        </a:spcBef>
+                        <a:spcAft>
+                          <a:spcPts val="0"/>
+                        </a:spcAft>
+                        <a:buNone/>
+                      </a:pPr>
+                      <a:r>
+                        <a:rPr lang="en"/>
+                        <a:t>A+</a:t>
+                      </a:r>
+                      <a:endParaRPr/>
+                    </a:p>
+                  </a:txBody>
+                  <a:tcPr marT="91425" marB="91425" marR="91425" marL="91425"/>
+                </a:tc>
+                <a:tc>
+                  <a:txBody>
+                    <a:bodyPr/>
+                    <a:lstStyle/>
+                    <a:p>
+                      <a:pPr indent="0" lvl="0" marL="0" rtl="0" algn="l">
+                        <a:spcBef>
+                          <a:spcPts val="0"/>
+                        </a:spcBef>
+                        <a:spcAft>
+                          <a:spcPts val="0"/>
+                        </a:spcAft>
+                        <a:buNone/>
+                      </a:pPr>
+                      <a:r>
+                        <a:rPr lang="en"/>
+                        <a:t>Added ASCII Art</a:t>
+                      </a:r>
+                      <a:endParaRPr/>
+                    </a:p>
+                  </a:txBody>
+                  <a:tcPr marT="91425" marB="91425" marR="91425" marL="91425"/>
+                </a:tc>
+              </a:tr>
+            </a:tbl>
+          </a:graphicData>
+        </a:graphic>
+      </p:graphicFrame>
+    </p:spTree>
+  </p:cSld>
+  <p:clrMapOvr>
+    <a:masterClrMapping/>
+  </p:clrMapOvr>
+</p:sld>
+</file>
+
 <file path=ppt/theme/theme1.xml><?xml version="1.0" encoding="utf-8"?>
+<a:theme xmlns:a="http://schemas.openxmlformats.org/drawingml/2006/main" xmlns:r="http://schemas.openxmlformats.org/officeDocument/2006/relationships" name="Simple Light">
+  <a:themeElements>
+    <a:clrScheme name="Simple Light">
+      <a:dk1>
+        <a:srgbClr val="000000"/>
+      </a:dk1>
+      <a:lt1>
+        <a:srgbClr val="FFFFFF"/>
+      </a:lt1>
+      <a:dk2>
+        <a:srgbClr val="595959"/>
+      </a:dk2>
+      <a:lt2>
+        <a:srgbClr val="EEEEEE"/>
+      </a:lt2>
+      <a:accent1>
+        <a:srgbClr val="4285F4"/>
+      </a:accent1>
+      <a:accent2>
+        <a:srgbClr val="212121"/>
+      </a:accent2>
+      <a:accent3>
+        <a:srgbClr val="78909C"/>
+      </a:accent3>
+      <a:accent4>
+        <a:srgbClr val="FFAB40"/>
+      </a:accent4>
+      <a:accent5>
+        <a:srgbClr val="0097A7"/>
+      </a:accent5>
+      <a:accent6>
+        <a:srgbClr val="EEFF41"/>
+      </a:accent6>
+      <a:hlink>
+        <a:srgbClr val="0097A7"/>
+      </a:hlink>
+      <a:folHlink>
+        <a:srgbClr val="0097A7"/>
+      </a:folHlink>
+    </a:clrScheme>
+    <a:fontScheme name="Office">
+      <a:majorFont>
+        <a:latin typeface="Arial"/>
+        <a:ea typeface=""/>
+        <a:cs typeface=""/>
+        <a:font script="Jpan" typeface="ＭＳ Ｐゴシック"/>
+        <a:font script="Hang" typeface="맑은 고딕"/>
+        <a:font script="Hans" typeface="宋体"/>
+        <a:font script="Hant" typeface="新細明體"/>
+        <a:font script="Arab" typeface="Times New Roman"/>
+        <a:font script="Hebr" typeface="Times New Roman"/>
+        <a:font script="Thai" typeface="Angsana New"/>
+        <a:font script="Ethi" typeface="Nyala"/>
+        <a:font script="Beng" typeface="Vrinda"/>
+        <a:font script="Gujr" typeface="Shruti"/>
+        <a:font script="Khmr" typeface="MoolBoran"/>
+        <a:font script="Knda" typeface="Tunga"/>
+        <a:font script="Guru" typeface="Raavi"/>
+        <a:font script="Cans" typeface="Euphemia"/>
+        <a:font script="Cher" typeface="Plantagenet Cherokee"/>
+        <a:font script="Yiii" typeface="Microsoft Yi Baiti"/>
+        <a:font script="Tibt" typeface="Microsoft Himalaya"/>
+        <a:font script="Thaa" typeface="MV Boli"/>
+        <a:font script="Deva" typeface="Mangal"/>
+        <a:font script="Telu" typeface="Gautami"/>
+        <a:font script="Taml" typeface="Latha"/>
+        <a:font script="Syrc" typeface="Estrangelo Edessa"/>
+        <a:font script="Orya" typeface="Kalinga"/>
+        <a:font script="Mlym" typeface="Kartika"/>
+        <a:font script="Laoo" typeface="DokChampa"/>
+        <a:font script="Sinh" typeface="Iskoola Pota"/>
+        <a:font script="Mong" typeface="Mongolian Baiti"/>
+        <a:font script="Viet" typeface="Times New Roman"/>
+        <a:font script="Uigh" typeface="Microsoft Uighur"/>
+        <a:font script="Geor" typeface="Sylfaen"/>
+      </a:majorFont>
+      <a:minorFont>
+        <a:latin typeface="Arial"/>
+        <a:ea typeface=""/>
+        <a:cs typeface=""/>
+        <a:font script="Jpan" typeface="ＭＳ Ｐゴシック"/>
+        <a:font script="Hang" typeface="맑은 고딕"/>
+        <a:font script="Hans" typeface="宋体"/>
+        <a:font script="Hant" typeface="新細明體"/>
+        <a:font script="Arab" typeface="Arial"/>
+        <a:font script="Hebr" typeface="Arial"/>
+        <a:font script="Thai" typeface="Cordia New"/>
+        <a:font script="Ethi" typeface="Nyala"/>
+        <a:font script="Beng" typeface="Vrinda"/>
+        <a:font script="Gujr" typeface="Shruti"/>
+        <a:font script="Khmr" typeface="DaunPenh"/>
+        <a:font script="Knda" typeface="Tunga"/>
+        <a:font script="Guru" typeface="Raavi"/>
+        <a:font script="Cans" typeface="Euphemia"/>
+        <a:font script="Cher" typeface="Plantagenet Cherokee"/>
+        <a:font script="Yiii" typeface="Microsoft Yi Baiti"/>
+        <a:font script="Tibt" typeface="Microsoft Himalaya"/>
+        <a:font script="Thaa" typeface="MV Boli"/>
+        <a:font script="Deva" typeface="Mangal"/>
+        <a:font script="Telu" typeface="Gautami"/>
+        <a:font script="Taml" typeface="Latha"/>
+        <a:font script="Syrc" typeface="Estrangelo Edessa"/>
+        <a:font script="Orya" typeface="Kalinga"/>
+        <a:font script="Mlym" typeface="Kartika"/>
+        <a:font script="Laoo" typeface="DokChampa"/>
+        <a:font script="Sinh" typeface="Iskoola Pota"/>
+        <a:font script="Mong" typeface="Mongolian Baiti"/>
+        <a:font script="Viet" typeface="Arial"/>
+        <a:font script="Uigh" typeface="Microsoft Uighur"/>
+        <a:font script="Geor" typeface="Sylfaen"/>
+      </a:minorFont>
+    </a:fontScheme>
+    <a:fmtScheme name="Office">
+      <a:fillStyleLst>
+        <a:solidFill>
+          <a:schemeClr val="phClr"/>
+        </a:solidFill>
+        <a:gradFill rotWithShape="1">
+          <a:gsLst>
+            <a:gs pos="0">
+              <a:schemeClr val="phClr">
+                <a:tint val="50000"/>
+                <a:satMod val="300000"/>
+              </a:schemeClr>
+            </a:gs>
+            <a:gs pos="35000">
+              <a:schemeClr val="phClr">
+                <a:tint val="37000"/>
+                <a:satMod val="300000"/>
+              </a:schemeClr>
+            </a:gs>
+            <a:gs pos="100000">
+              <a:schemeClr val="phClr">
+                <a:tint val="15000"/>
+                <a:satMod val="350000"/>
+              </a:schemeClr>
+            </a:gs>
+          </a:gsLst>
+          <a:lin ang="16200000" scaled="1"/>
+        </a:gradFill>
+        <a:gradFill rotWithShape="1">
+          <a:gsLst>
+            <a:gs pos="0">
+              <a:schemeClr val="phClr">
+                <a:tint val="100000"/>
+                <a:shade val="100000"/>
+                <a:satMod val="130000"/>
+              </a:schemeClr>
+            </a:gs>
+            <a:gs pos="100000">
+              <a:schemeClr val="phClr">
+                <a:tint val="50000"/>
+                <a:shade val="100000"/>
+                <a:satMod val="350000"/>
+              </a:schemeClr>
+            </a:gs>
+          </a:gsLst>
+          <a:lin ang="16200000" scaled="0"/>
+        </a:gradFill>
+      </a:fillStyleLst>
+      <a:lnStyleLst>
+        <a:ln w="9525" cap="flat" cmpd="sng" algn="ctr">
+          <a:solidFill>
+            <a:schemeClr val="phClr">
+              <a:shade val="95000"/>
+              <a:satMod val="105000"/>
+            </a:schemeClr>
+          </a:solidFill>
+          <a:prstDash val="solid"/>
+        </a:ln>
+        <a:ln w="25400" cap="flat" cmpd="sng" algn="ctr">
+          <a:solidFill>
+            <a:schemeClr val="phClr"/>
+          </a:solidFill>
+          <a:prstDash val="solid"/>
+        </a:ln>
+        <a:ln w="38100" cap="flat" cmpd="sng" algn="ctr">
+          <a:solidFill>
+            <a:schemeClr val="phClr"/>
+          </a:solidFill>
+          <a:prstDash val="solid"/>
+        </a:ln>
+      </a:lnStyleLst>
+      <a:effectStyleLst>
+        <a:effectStyle>
+          <a:effectLst>
+            <a:outerShdw blurRad="40000" dist="20000" dir="5400000" rotWithShape="0">
+              <a:srgbClr val="000000">
+                <a:alpha val="38000"/>
+              </a:srgbClr>
+            </a:outerShdw>
+          </a:effectLst>
+        </a:effectStyle>
+        <a:effectStyle>
+          <a:effectLst>
+            <a:outerShdw blurRad="40000" dist="23000" dir="5400000" rotWithShape="0">
+              <a:srgbClr val="000000">
+                <a:alpha val="35000"/>
+              </a:srgbClr>
+            </a:outerShdw>
+          </a:effectLst>
+        </a:effectStyle>
+        <a:effectStyle>
+          <a:effectLst>
+            <a:outerShdw blurRad="40000" dist="23000" dir="5400000" rotWithShape="0">
+              <a:srgbClr val="000000">
+                <a:alpha val="35000"/>
+              </a:srgbClr>
+            </a:outerShdw>
+          </a:effectLst>
+          <a:scene3d>
+            <a:camera prst="orthographicFront">
+              <a:rot lat="0" lon="0" rev="0"/>
+            </a:camera>
+            <a:lightRig rig="threePt" dir="t">
+              <a:rot lat="0" lon="0" rev="1200000"/>
+            </a:lightRig>
+          </a:scene3d>
+          <a:sp3d>
+            <a:bevelT w="63500" h="25400"/>
+          </a:sp3d>
+        </a:effectStyle>
+      </a:effectStyleLst>
+      <a:bgFillStyleLst>
+        <a:solidFill>
+          <a:schemeClr val="phClr"/>
+        </a:solidFill>
+        <a:gradFill rotWithShape="1">
+          <a:gsLst>
+            <a:gs pos="0">
+              <a:schemeClr val="phClr">
+                <a:tint val="40000"/>
+                <a:satMod val="350000"/>
+              </a:schemeClr>
+            </a:gs>
+            <a:gs pos="40000">
+              <a:schemeClr val="phClr">
+                <a:tint val="45000"/>
+                <a:shade val="99000"/>
+                <a:satMod val="350000"/>
+              </a:schemeClr>
+            </a:gs>
+            <a:gs pos="100000">
+              <a:schemeClr val="phClr">
+                <a:shade val="20000"/>
+                <a:satMod val="255000"/>
+              </a:schemeClr>
+            </a:gs>
+          </a:gsLst>
+          <a:path path="circle">
+            <a:fillToRect l="50000" t="-80000" r="50000" b="180000"/>
+          </a:path>
+        </a:gradFill>
+        <a:gradFill rotWithShape="1">
+          <a:gsLst>
+            <a:gs pos="0">
+              <a:schemeClr val="phClr">
+                <a:tint val="80000"/>
+                <a:satMod val="300000"/>
+              </a:schemeClr>
+            </a:gs>
+            <a:gs pos="100000">
+              <a:schemeClr val="phClr">
+                <a:shade val="30000"/>
+                <a:satMod val="200000"/>
+              </a:schemeClr>
+            </a:gs>
+          </a:gsLst>
+          <a:path path="circle">
+            <a:fillToRect l="50000" t="50000" r="50000" b="50000"/>
+          </a:path>
+        </a:gradFill>
+      </a:bgFillStyleLst>
+    </a:fmtScheme>
+  </a:themeElements>
+</a:theme>
+</file>
+
+<file path=ppt/theme/theme2.xml><?xml version="1.0" encoding="utf-8"?>
 <a:theme xmlns:a="http://schemas.openxmlformats.org/drawingml/2006/main" xmlns:r="http://schemas.openxmlformats.org/officeDocument/2006/relationships">
   <a:themeElements>
     <a:clrScheme name="Default">
@@ -6398,283 +7706,4 @@
     </a:fmtScheme>
   </a:themeElements>
 </a:theme>
-</file>
-
-<file path=ppt/theme/theme2.xml><?xml version="1.0" encoding="utf-8"?>
-<a:theme xmlns:a="http://schemas.openxmlformats.org/drawingml/2006/main" xmlns:r="http://schemas.openxmlformats.org/officeDocument/2006/relationships" name="Simple Light">
-  <a:themeElements>
-    <a:clrScheme name="Simple Light">
-      <a:dk1>
-        <a:srgbClr val="000000"/>
-      </a:dk1>
-      <a:lt1>
-        <a:srgbClr val="FFFFFF"/>
-      </a:lt1>
-      <a:dk2>
-        <a:srgbClr val="595959"/>
-      </a:dk2>
-      <a:lt2>
-        <a:srgbClr val="EEEEEE"/>
-      </a:lt2>
-      <a:accent1>
-        <a:srgbClr val="4285F4"/>
-      </a:accent1>
-      <a:accent2>
-        <a:srgbClr val="212121"/>
-      </a:accent2>
-      <a:accent3>
-        <a:srgbClr val="78909C"/>
-      </a:accent3>
-      <a:accent4>
-        <a:srgbClr val="FFAB40"/>
-      </a:accent4>
-      <a:accent5>
-        <a:srgbClr val="0097A7"/>
-      </a:accent5>
-      <a:accent6>
-        <a:srgbClr val="EEFF41"/>
-      </a:accent6>
-      <a:hlink>
-        <a:srgbClr val="0097A7"/>
-      </a:hlink>
-      <a:folHlink>
-        <a:srgbClr val="0097A7"/>
-      </a:folHlink>
-    </a:clrScheme>
-    <a:fontScheme name="Office">
-      <a:majorFont>
-        <a:latin typeface="Arial"/>
-        <a:ea typeface=""/>
-        <a:cs typeface=""/>
-        <a:font script="Jpan" typeface="ＭＳ Ｐゴシック"/>
-        <a:font script="Hang" typeface="맑은 고딕"/>
-        <a:font script="Hans" typeface="宋体"/>
-        <a:font script="Hant" typeface="新細明體"/>
-        <a:font script="Arab" typeface="Times New Roman"/>
-        <a:font script="Hebr" typeface="Times New Roman"/>
-        <a:font script="Thai" typeface="Angsana New"/>
-        <a:font script="Ethi" typeface="Nyala"/>
-        <a:font script="Beng" typeface="Vrinda"/>
-        <a:font script="Gujr" typeface="Shruti"/>
-        <a:font script="Khmr" typeface="MoolBoran"/>
-        <a:font script="Knda" typeface="Tunga"/>
-        <a:font script="Guru" typeface="Raavi"/>
-        <a:font script="Cans" typeface="Euphemia"/>
-        <a:font script="Cher" typeface="Plantagenet Cherokee"/>
-        <a:font script="Yiii" typeface="Microsoft Yi Baiti"/>
-        <a:font script="Tibt" typeface="Microsoft Himalaya"/>
-        <a:font script="Thaa" typeface="MV Boli"/>
-        <a:font script="Deva" typeface="Mangal"/>
-        <a:font script="Telu" typeface="Gautami"/>
-        <a:font script="Taml" typeface="Latha"/>
-        <a:font script="Syrc" typeface="Estrangelo Edessa"/>
-        <a:font script="Orya" typeface="Kalinga"/>
-        <a:font script="Mlym" typeface="Kartika"/>
-        <a:font script="Laoo" typeface="DokChampa"/>
-        <a:font script="Sinh" typeface="Iskoola Pota"/>
-        <a:font script="Mong" typeface="Mongolian Baiti"/>
-        <a:font script="Viet" typeface="Times New Roman"/>
-        <a:font script="Uigh" typeface="Microsoft Uighur"/>
-        <a:font script="Geor" typeface="Sylfaen"/>
-      </a:majorFont>
-      <a:minorFont>
-        <a:latin typeface="Arial"/>
-        <a:ea typeface=""/>
-        <a:cs typeface=""/>
-        <a:font script="Jpan" typeface="ＭＳ Ｐゴシック"/>
-        <a:font script="Hang" typeface="맑은 고딕"/>
-        <a:font script="Hans" typeface="宋体"/>
-        <a:font script="Hant" typeface="新細明體"/>
-        <a:font script="Arab" typeface="Arial"/>
-        <a:font script="Hebr" typeface="Arial"/>
-        <a:font script="Thai" typeface="Cordia New"/>
-        <a:font script="Ethi" typeface="Nyala"/>
-        <a:font script="Beng" typeface="Vrinda"/>
-        <a:font script="Gujr" typeface="Shruti"/>
-        <a:font script="Khmr" typeface="DaunPenh"/>
-        <a:font script="Knda" typeface="Tunga"/>
-        <a:font script="Guru" typeface="Raavi"/>
-        <a:font script="Cans" typeface="Euphemia"/>
-        <a:font script="Cher" typeface="Plantagenet Cherokee"/>
-        <a:font script="Yiii" typeface="Microsoft Yi Baiti"/>
-        <a:font script="Tibt" typeface="Microsoft Himalaya"/>
-        <a:font script="Thaa" typeface="MV Boli"/>
-        <a:font script="Deva" typeface="Mangal"/>
-        <a:font script="Telu" typeface="Gautami"/>
-        <a:font script="Taml" typeface="Latha"/>
-        <a:font script="Syrc" typeface="Estrangelo Edessa"/>
-        <a:font script="Orya" typeface="Kalinga"/>
-        <a:font script="Mlym" typeface="Kartika"/>
-        <a:font script="Laoo" typeface="DokChampa"/>
-        <a:font script="Sinh" typeface="Iskoola Pota"/>
-        <a:font script="Mong" typeface="Mongolian Baiti"/>
-        <a:font script="Viet" typeface="Arial"/>
-        <a:font script="Uigh" typeface="Microsoft Uighur"/>
-        <a:font script="Geor" typeface="Sylfaen"/>
-      </a:minorFont>
-    </a:fontScheme>
-    <a:fmtScheme name="Office">
-      <a:fillStyleLst>
-        <a:solidFill>
-          <a:schemeClr val="phClr"/>
-        </a:solidFill>
-        <a:gradFill rotWithShape="1">
-          <a:gsLst>
-            <a:gs pos="0">
-              <a:schemeClr val="phClr">
-                <a:tint val="50000"/>
-                <a:satMod val="300000"/>
-              </a:schemeClr>
-            </a:gs>
-            <a:gs pos="35000">
-              <a:schemeClr val="phClr">
-                <a:tint val="37000"/>
-                <a:satMod val="300000"/>
-              </a:schemeClr>
-            </a:gs>
-            <a:gs pos="100000">
-              <a:schemeClr val="phClr">
-                <a:tint val="15000"/>
-                <a:satMod val="350000"/>
-              </a:schemeClr>
-            </a:gs>
-          </a:gsLst>
-          <a:lin ang="16200000" scaled="1"/>
-        </a:gradFill>
-        <a:gradFill rotWithShape="1">
-          <a:gsLst>
-            <a:gs pos="0">
-              <a:schemeClr val="phClr">
-                <a:tint val="100000"/>
-                <a:shade val="100000"/>
-                <a:satMod val="130000"/>
-              </a:schemeClr>
-            </a:gs>
-            <a:gs pos="100000">
-              <a:schemeClr val="phClr">
-                <a:tint val="50000"/>
-                <a:shade val="100000"/>
-                <a:satMod val="350000"/>
-              </a:schemeClr>
-            </a:gs>
-          </a:gsLst>
-          <a:lin ang="16200000" scaled="0"/>
-        </a:gradFill>
-      </a:fillStyleLst>
-      <a:lnStyleLst>
-        <a:ln w="9525" cap="flat" cmpd="sng" algn="ctr">
-          <a:solidFill>
-            <a:schemeClr val="phClr">
-              <a:shade val="95000"/>
-              <a:satMod val="105000"/>
-            </a:schemeClr>
-          </a:solidFill>
-          <a:prstDash val="solid"/>
-        </a:ln>
-        <a:ln w="25400" cap="flat" cmpd="sng" algn="ctr">
-          <a:solidFill>
-            <a:schemeClr val="phClr"/>
-          </a:solidFill>
-          <a:prstDash val="solid"/>
-        </a:ln>
-        <a:ln w="38100" cap="flat" cmpd="sng" algn="ctr">
-          <a:solidFill>
-            <a:schemeClr val="phClr"/>
-          </a:solidFill>
-          <a:prstDash val="solid"/>
-        </a:ln>
-      </a:lnStyleLst>
-      <a:effectStyleLst>
-        <a:effectStyle>
-          <a:effectLst>
-            <a:outerShdw blurRad="40000" dist="20000" dir="5400000" rotWithShape="0">
-              <a:srgbClr val="000000">
-                <a:alpha val="38000"/>
-              </a:srgbClr>
-            </a:outerShdw>
-          </a:effectLst>
-        </a:effectStyle>
-        <a:effectStyle>
-          <a:effectLst>
-            <a:outerShdw blurRad="40000" dist="23000" dir="5400000" rotWithShape="0">
-              <a:srgbClr val="000000">
-                <a:alpha val="35000"/>
-              </a:srgbClr>
-            </a:outerShdw>
-          </a:effectLst>
-        </a:effectStyle>
-        <a:effectStyle>
-          <a:effectLst>
-            <a:outerShdw blurRad="40000" dist="23000" dir="5400000" rotWithShape="0">
-              <a:srgbClr val="000000">
-                <a:alpha val="35000"/>
-              </a:srgbClr>
-            </a:outerShdw>
-          </a:effectLst>
-          <a:scene3d>
-            <a:camera prst="orthographicFront">
-              <a:rot lat="0" lon="0" rev="0"/>
-            </a:camera>
-            <a:lightRig rig="threePt" dir="t">
-              <a:rot lat="0" lon="0" rev="1200000"/>
-            </a:lightRig>
-          </a:scene3d>
-          <a:sp3d>
-            <a:bevelT w="63500" h="25400"/>
-          </a:sp3d>
-        </a:effectStyle>
-      </a:effectStyleLst>
-      <a:bgFillStyleLst>
-        <a:solidFill>
-          <a:schemeClr val="phClr"/>
-        </a:solidFill>
-        <a:gradFill rotWithShape="1">
-          <a:gsLst>
-            <a:gs pos="0">
-              <a:schemeClr val="phClr">
-                <a:tint val="40000"/>
-                <a:satMod val="350000"/>
-              </a:schemeClr>
-            </a:gs>
-            <a:gs pos="40000">
-              <a:schemeClr val="phClr">
-                <a:tint val="45000"/>
-                <a:shade val="99000"/>
-                <a:satMod val="350000"/>
-              </a:schemeClr>
-            </a:gs>
-            <a:gs pos="100000">
-              <a:schemeClr val="phClr">
-                <a:shade val="20000"/>
-                <a:satMod val="255000"/>
-              </a:schemeClr>
-            </a:gs>
-          </a:gsLst>
-          <a:path path="circle">
-            <a:fillToRect l="50000" t="-80000" r="50000" b="180000"/>
-          </a:path>
-        </a:gradFill>
-        <a:gradFill rotWithShape="1">
-          <a:gsLst>
-            <a:gs pos="0">
-              <a:schemeClr val="phClr">
-                <a:tint val="80000"/>
-                <a:satMod val="300000"/>
-              </a:schemeClr>
-            </a:gs>
-            <a:gs pos="100000">
-              <a:schemeClr val="phClr">
-                <a:shade val="30000"/>
-                <a:satMod val="200000"/>
-              </a:schemeClr>
-            </a:gs>
-          </a:gsLst>
-          <a:path path="circle">
-            <a:fillToRect l="50000" t="50000" r="50000" b="50000"/>
-          </a:path>
-        </a:gradFill>
-      </a:bgFillStyleLst>
-    </a:fmtScheme>
-  </a:themeElements>
-</a:theme>
 </file>